--- a/public/Liivrr_Strategic_Execution_Roadmap.pptx
+++ b/public/Liivrr_Strategic_Execution_Roadmap.pptx
@@ -1872,8 +1872,47 @@
         </p:nvSpPr>
         <p:spPr>
           <a:xfrm>
-            <a:off x="457200" y="3749040"/>
-            <a:ext cx="7132320" cy="2194560"/>
+            <a:off x="457200" y="3566160"/>
+            <a:ext cx="7132320" cy="365760"/>
+          </a:xfrm>
+          <a:prstGeom prst="rect">
+            <a:avLst/>
+          </a:prstGeom>
+          <a:noFill/>
+          <a:ln/>
+        </p:spPr>
+        <p:txBody>
+          <a:bodyPr wrap="square" lIns="0" tIns="0" rIns="0" bIns="0" rtlCol="0" anchor="ctr"/>
+          <a:lstStyle/>
+          <a:p>
+            <a:pPr indent="0" marL="0">
+              <a:buNone/>
+            </a:pPr>
+            <a:r>
+              <a:rPr lang="en-US" sz="1400" dirty="0">
+                <a:solidFill>
+                  <a:srgbClr val="E3B33B"/>
+                </a:solidFill>
+                <a:latin typeface="Calibri" pitchFamily="34" charset="0"/>
+                <a:ea typeface="Calibri" pitchFamily="34" charset="-122"/>
+                <a:cs typeface="Calibri" pitchFamily="34" charset="-120"/>
+              </a:rPr>
+              <a:t>Prepared by: Candidate for COO/BD</a:t>
+            </a:r>
+            <a:endParaRPr lang="en-US" sz="1400" dirty="0"/>
+          </a:p>
+        </p:txBody>
+      </p:sp>
+      <p:sp>
+        <p:nvSpPr>
+          <p:cNvPr id="11" name="Text 9"/>
+          <p:cNvSpPr/>
+          <p:nvPr/>
+        </p:nvSpPr>
+        <p:spPr>
+          <a:xfrm>
+            <a:off x="457200" y="4023360"/>
+            <a:ext cx="7132320" cy="2011680"/>
           </a:xfrm>
           <a:prstGeom prst="rect">
             <a:avLst/>
@@ -1897,7 +1936,7 @@
                 <a:ea typeface="Calibri" pitchFamily="34" charset="-122"/>
                 <a:cs typeface="Calibri" pitchFamily="34" charset="-120"/>
               </a:rPr>
-              <a:t>Prepared by: Candidate for COO/BD</a:t>
+              <a:t>Objective: A systematic blueprint to scale Liivrr through five hyper-efficient phases. Each step outlines the strategic objective (What), the business rationale (Why), and the precise execution path (How) to hit our core milestone of 1,000 active users and 50 merchant tenants (restaurants &amp; event organizers) by December 2026.</a:t>
             </a:r>
             <a:endParaRPr lang="en-US" sz="1600" dirty="0"/>
           </a:p>
@@ -1905,7 +1944,7 @@
       </p:sp>
       <p:sp>
         <p:nvSpPr>
-          <p:cNvPr id="11" name="Shape 9"/>
+          <p:cNvPr id="12" name="Shape 10"/>
           <p:cNvSpPr/>
           <p:nvPr/>
         </p:nvSpPr>
@@ -1930,7 +1969,7 @@
       </p:sp>
       <p:sp>
         <p:nvSpPr>
-          <p:cNvPr id="12" name="Text 10"/>
+          <p:cNvPr id="13" name="Text 11"/>
           <p:cNvSpPr/>
           <p:nvPr/>
         </p:nvSpPr>
@@ -3292,7 +3331,7 @@
               <a:buNone/>
             </a:pPr>
             <a:r>
-              <a:rPr lang="en-US" sz="1500" b="1" spc="200" kern="0" dirty="0">
+              <a:rPr lang="en-US" sz="1300" b="1" spc="100" kern="0" dirty="0">
                 <a:solidFill>
                   <a:srgbClr val="F7F5EE"/>
                 </a:solidFill>
@@ -3393,7 +3432,7 @@
               <a:buNone/>
             </a:pPr>
             <a:r>
-              <a:rPr lang="en-US" sz="1500" b="1" spc="200" kern="0" dirty="0">
+              <a:rPr lang="en-US" sz="1300" b="1" spc="100" kern="0" dirty="0">
                 <a:solidFill>
                   <a:srgbClr val="F7F5EE"/>
                 </a:solidFill>
@@ -3494,7 +3533,7 @@
               <a:buNone/>
             </a:pPr>
             <a:r>
-              <a:rPr lang="en-US" sz="1500" b="1" spc="200" kern="0" dirty="0">
+              <a:rPr lang="en-US" sz="1300" b="1" spc="100" kern="0" dirty="0">
                 <a:solidFill>
                   <a:srgbClr val="F7F5EE"/>
                 </a:solidFill>
@@ -3595,7 +3634,7 @@
               <a:buNone/>
             </a:pPr>
             <a:r>
-              <a:rPr lang="en-US" sz="1500" b="1" spc="200" kern="0" dirty="0">
+              <a:rPr lang="en-US" sz="1300" b="1" spc="100" kern="0" dirty="0">
                 <a:solidFill>
                   <a:srgbClr val="F7F5EE"/>
                 </a:solidFill>
@@ -3696,7 +3735,7 @@
               <a:buNone/>
             </a:pPr>
             <a:r>
-              <a:rPr lang="en-US" sz="1500" b="1" spc="200" kern="0" dirty="0">
+              <a:rPr lang="en-US" sz="1300" b="1" spc="100" kern="0" dirty="0">
                 <a:solidFill>
                   <a:srgbClr val="F7F5EE"/>
                 </a:solidFill>
@@ -5204,7 +5243,7 @@
               <a:buNone/>
             </a:pPr>
             <a:r>
-              <a:rPr lang="en-US" sz="1250" dirty="0">
+              <a:rPr lang="en-US" sz="1400" dirty="0">
                 <a:solidFill>
                   <a:srgbClr val="F7F5EE"/>
                 </a:solidFill>
@@ -5241,7 +5280,7 @@
               <a:buNone/>
             </a:pPr>
             <a:r>
-              <a:rPr lang="en-US" sz="1250" dirty="0">
+              <a:rPr lang="en-US" sz="1400" dirty="0">
                 <a:solidFill>
                   <a:srgbClr val="F7F5EE"/>
                 </a:solidFill>
@@ -5303,7 +5342,7 @@
               <a:buNone/>
             </a:pPr>
             <a:r>
-              <a:rPr lang="en-US" sz="1250" dirty="0">
+              <a:rPr lang="en-US" sz="1400" dirty="0">
                 <a:solidFill>
                   <a:srgbClr val="F7F5EE"/>
                 </a:solidFill>
@@ -5323,7 +5362,7 @@
               <a:buNone/>
             </a:pPr>
             <a:r>
-              <a:rPr lang="en-US" sz="1250" dirty="0">
+              <a:rPr lang="en-US" sz="1400" dirty="0">
                 <a:solidFill>
                   <a:srgbClr val="F7F5EE"/>
                 </a:solidFill>
@@ -5343,7 +5382,7 @@
               <a:buNone/>
             </a:pPr>
             <a:r>
-              <a:rPr lang="en-US" sz="1250" dirty="0">
+              <a:rPr lang="en-US" sz="1400" dirty="0">
                 <a:solidFill>
                   <a:srgbClr val="F7F5EE"/>
                 </a:solidFill>
@@ -5363,7 +5402,7 @@
               <a:buNone/>
             </a:pPr>
             <a:r>
-              <a:rPr lang="en-US" sz="1250" dirty="0">
+              <a:rPr lang="en-US" sz="1400" dirty="0">
                 <a:solidFill>
                   <a:srgbClr val="F7F5EE"/>
                 </a:solidFill>
@@ -5720,7 +5759,7 @@
               <a:buNone/>
             </a:pPr>
             <a:r>
-              <a:rPr lang="en-US" sz="1250" dirty="0">
+              <a:rPr lang="en-US" sz="1400" dirty="0">
                 <a:solidFill>
                   <a:srgbClr val="F7F5EE"/>
                 </a:solidFill>
@@ -5757,7 +5796,7 @@
               <a:buNone/>
             </a:pPr>
             <a:r>
-              <a:rPr lang="en-US" sz="1250" dirty="0">
+              <a:rPr lang="en-US" sz="1400" dirty="0">
                 <a:solidFill>
                   <a:srgbClr val="F7F5EE"/>
                 </a:solidFill>
@@ -5819,7 +5858,7 @@
               <a:buNone/>
             </a:pPr>
             <a:r>
-              <a:rPr lang="en-US" sz="1250" dirty="0">
+              <a:rPr lang="en-US" sz="1400" dirty="0">
                 <a:solidFill>
                   <a:srgbClr val="F7F5EE"/>
                 </a:solidFill>
@@ -5839,7 +5878,7 @@
               <a:buNone/>
             </a:pPr>
             <a:r>
-              <a:rPr lang="en-US" sz="1250" dirty="0">
+              <a:rPr lang="en-US" sz="1400" dirty="0">
                 <a:solidFill>
                   <a:srgbClr val="F7F5EE"/>
                 </a:solidFill>
@@ -5859,7 +5898,7 @@
               <a:buNone/>
             </a:pPr>
             <a:r>
-              <a:rPr lang="en-US" sz="1250" dirty="0">
+              <a:rPr lang="en-US" sz="1400" dirty="0">
                 <a:solidFill>
                   <a:srgbClr val="F7F5EE"/>
                 </a:solidFill>
@@ -5879,7 +5918,7 @@
               <a:buNone/>
             </a:pPr>
             <a:r>
-              <a:rPr lang="en-US" sz="1250" dirty="0">
+              <a:rPr lang="en-US" sz="1400" dirty="0">
                 <a:solidFill>
                   <a:srgbClr val="A3AAB3"/>
                 </a:solidFill>
@@ -5899,7 +5938,7 @@
               <a:buNone/>
             </a:pPr>
             <a:r>
-              <a:rPr lang="en-US" sz="1250" dirty="0">
+              <a:rPr lang="en-US" sz="1400" dirty="0">
                 <a:solidFill>
                   <a:srgbClr val="A3AAB3"/>
                 </a:solidFill>
@@ -6256,7 +6295,7 @@
               <a:buNone/>
             </a:pPr>
             <a:r>
-              <a:rPr lang="en-US" sz="1250" dirty="0">
+              <a:rPr lang="en-US" sz="1400" dirty="0">
                 <a:solidFill>
                   <a:srgbClr val="F7F5EE"/>
                 </a:solidFill>
@@ -6293,7 +6332,7 @@
               <a:buNone/>
             </a:pPr>
             <a:r>
-              <a:rPr lang="en-US" sz="1250" dirty="0">
+              <a:rPr lang="en-US" sz="1400" dirty="0">
                 <a:solidFill>
                   <a:srgbClr val="F7F5EE"/>
                 </a:solidFill>
@@ -6355,7 +6394,7 @@
               <a:buNone/>
             </a:pPr>
             <a:r>
-              <a:rPr lang="en-US" sz="1250" dirty="0">
+              <a:rPr lang="en-US" sz="1400" dirty="0">
                 <a:solidFill>
                   <a:srgbClr val="F7F5EE"/>
                 </a:solidFill>
@@ -6375,7 +6414,7 @@
               <a:buNone/>
             </a:pPr>
             <a:r>
-              <a:rPr lang="en-US" sz="1250" dirty="0">
+              <a:rPr lang="en-US" sz="1400" dirty="0">
                 <a:solidFill>
                   <a:srgbClr val="F7F5EE"/>
                 </a:solidFill>
@@ -6395,7 +6434,7 @@
               <a:buNone/>
             </a:pPr>
             <a:r>
-              <a:rPr lang="en-US" sz="1250" dirty="0">
+              <a:rPr lang="en-US" sz="1400" dirty="0">
                 <a:solidFill>
                   <a:srgbClr val="F7F5EE"/>
                 </a:solidFill>
@@ -6752,7 +6791,7 @@
               <a:buNone/>
             </a:pPr>
             <a:r>
-              <a:rPr lang="en-US" sz="1250" dirty="0">
+              <a:rPr lang="en-US" sz="1400" dirty="0">
                 <a:solidFill>
                   <a:srgbClr val="F7F5EE"/>
                 </a:solidFill>
@@ -6789,7 +6828,7 @@
               <a:buNone/>
             </a:pPr>
             <a:r>
-              <a:rPr lang="en-US" sz="1250" dirty="0">
+              <a:rPr lang="en-US" sz="1400" dirty="0">
                 <a:solidFill>
                   <a:srgbClr val="F7F5EE"/>
                 </a:solidFill>
@@ -6851,7 +6890,7 @@
               <a:buNone/>
             </a:pPr>
             <a:r>
-              <a:rPr lang="en-US" sz="1250" dirty="0">
+              <a:rPr lang="en-US" sz="1400" dirty="0">
                 <a:solidFill>
                   <a:srgbClr val="F7F5EE"/>
                 </a:solidFill>
@@ -6871,7 +6910,7 @@
               <a:buNone/>
             </a:pPr>
             <a:r>
-              <a:rPr lang="en-US" sz="1250" dirty="0">
+              <a:rPr lang="en-US" sz="1400" dirty="0">
                 <a:solidFill>
                   <a:srgbClr val="F7F5EE"/>
                 </a:solidFill>
@@ -6891,7 +6930,7 @@
               <a:buNone/>
             </a:pPr>
             <a:r>
-              <a:rPr lang="en-US" sz="1250" dirty="0">
+              <a:rPr lang="en-US" sz="1400" dirty="0">
                 <a:solidFill>
                   <a:srgbClr val="F7F5EE"/>
                 </a:solidFill>
@@ -7248,7 +7287,7 @@
               <a:buNone/>
             </a:pPr>
             <a:r>
-              <a:rPr lang="en-US" sz="1250" dirty="0">
+              <a:rPr lang="en-US" sz="1400" dirty="0">
                 <a:solidFill>
                   <a:srgbClr val="F7F5EE"/>
                 </a:solidFill>
@@ -7285,7 +7324,7 @@
               <a:buNone/>
             </a:pPr>
             <a:r>
-              <a:rPr lang="en-US" sz="1250" dirty="0">
+              <a:rPr lang="en-US" sz="1400" dirty="0">
                 <a:solidFill>
                   <a:srgbClr val="F7F5EE"/>
                 </a:solidFill>
@@ -7347,7 +7386,7 @@
               <a:buNone/>
             </a:pPr>
             <a:r>
-              <a:rPr lang="en-US" sz="1250" dirty="0">
+              <a:rPr lang="en-US" sz="1400" dirty="0">
                 <a:solidFill>
                   <a:srgbClr val="F7F5EE"/>
                 </a:solidFill>
@@ -7367,7 +7406,7 @@
               <a:buNone/>
             </a:pPr>
             <a:r>
-              <a:rPr lang="en-US" sz="1250" dirty="0">
+              <a:rPr lang="en-US" sz="1400" dirty="0">
                 <a:solidFill>
                   <a:srgbClr val="F7F5EE"/>
                 </a:solidFill>
@@ -7387,7 +7426,7 @@
               <a:buNone/>
             </a:pPr>
             <a:r>
-              <a:rPr lang="en-US" sz="1250" dirty="0">
+              <a:rPr lang="en-US" sz="1400" dirty="0">
                 <a:solidFill>
                   <a:srgbClr val="F7F5EE"/>
                 </a:solidFill>
